--- a/Course Plan/PPts/Unit_3_Part_1.pptx
+++ b/Course Plan/PPts/Unit_3_Part_1.pptx
@@ -251,7 +251,7 @@
           <a:p>
             <a:fld id="{2F4A91EB-9D04-4B2B-A8EC-C26057F35368}" type="datetimeFigureOut">
               <a:rPr lang="en-US" smtClean="0"/>
-              <a:t>3/2/2026</a:t>
+              <a:t>3/16/2026</a:t>
             </a:fld>
             <a:endParaRPr lang="en-US"/>
           </a:p>
@@ -2856,7 +2856,7 @@
             <a:fld id="{9334D819-9F07-4261-B09B-9E467E5D9002}" type="datetimeFigureOut">
               <a:rPr lang="en-US" dirty="0"/>
               <a:pPr/>
-              <a:t>3/2/2026</a:t>
+              <a:t>3/16/2026</a:t>
             </a:fld>
             <a:endParaRPr lang="en-US" dirty="0"/>
           </a:p>
@@ -3090,7 +3090,7 @@
           <a:p>
             <a:fld id="{9334D819-9F07-4261-B09B-9E467E5D9002}" type="datetimeFigureOut">
               <a:rPr lang="en-US" dirty="0"/>
-              <a:t>3/2/2026</a:t>
+              <a:t>3/16/2026</a:t>
             </a:fld>
             <a:endParaRPr lang="en-US" dirty="0"/>
           </a:p>
@@ -3265,7 +3265,7 @@
           <a:p>
             <a:fld id="{9334D819-9F07-4261-B09B-9E467E5D9002}" type="datetimeFigureOut">
               <a:rPr lang="en-US" dirty="0"/>
-              <a:t>3/2/2026</a:t>
+              <a:t>3/16/2026</a:t>
             </a:fld>
             <a:endParaRPr lang="en-US" dirty="0"/>
           </a:p>
@@ -5408,7 +5408,7 @@
             <a:fld id="{9334D819-9F07-4261-B09B-9E467E5D9002}" type="datetimeFigureOut">
               <a:rPr lang="en-US" dirty="0"/>
               <a:pPr/>
-              <a:t>3/2/2026</a:t>
+              <a:t>3/16/2026</a:t>
             </a:fld>
             <a:endParaRPr lang="en-US" dirty="0"/>
           </a:p>
@@ -6605,7 +6605,7 @@
           <a:p>
             <a:fld id="{9334D819-9F07-4261-B09B-9E467E5D9002}" type="datetimeFigureOut">
               <a:rPr lang="en-US" dirty="0"/>
-              <a:t>3/2/2026</a:t>
+              <a:t>3/16/2026</a:t>
             </a:fld>
             <a:endParaRPr lang="en-US" dirty="0"/>
           </a:p>
@@ -6990,7 +6990,7 @@
           <a:p>
             <a:fld id="{9334D819-9F07-4261-B09B-9E467E5D9002}" type="datetimeFigureOut">
               <a:rPr lang="en-US" dirty="0"/>
-              <a:t>3/2/2026</a:t>
+              <a:t>3/16/2026</a:t>
             </a:fld>
             <a:endParaRPr lang="en-US" dirty="0"/>
           </a:p>
@@ -7108,7 +7108,7 @@
           <a:p>
             <a:fld id="{9334D819-9F07-4261-B09B-9E467E5D9002}" type="datetimeFigureOut">
               <a:rPr lang="en-US" dirty="0"/>
-              <a:t>3/2/2026</a:t>
+              <a:t>3/16/2026</a:t>
             </a:fld>
             <a:endParaRPr lang="en-US" dirty="0"/>
           </a:p>
@@ -7198,7 +7198,7 @@
           <a:p>
             <a:fld id="{9334D819-9F07-4261-B09B-9E467E5D9002}" type="datetimeFigureOut">
               <a:rPr lang="en-US" dirty="0"/>
-              <a:t>3/2/2026</a:t>
+              <a:t>3/16/2026</a:t>
             </a:fld>
             <a:endParaRPr lang="en-US" dirty="0"/>
           </a:p>
@@ -7956,7 +7956,7 @@
           <a:p>
             <a:fld id="{9334D819-9F07-4261-B09B-9E467E5D9002}" type="datetimeFigureOut">
               <a:rPr lang="en-US" dirty="0"/>
-              <a:t>3/2/2026</a:t>
+              <a:t>3/16/2026</a:t>
             </a:fld>
             <a:endParaRPr lang="en-US" dirty="0"/>
           </a:p>
@@ -8791,7 +8791,7 @@
           <a:p>
             <a:fld id="{9334D819-9F07-4261-B09B-9E467E5D9002}" type="datetimeFigureOut">
               <a:rPr lang="en-US" dirty="0"/>
-              <a:t>3/2/2026</a:t>
+              <a:t>3/16/2026</a:t>
             </a:fld>
             <a:endParaRPr lang="en-US" dirty="0"/>
           </a:p>
@@ -9014,7 +9014,7 @@
             <a:fld id="{9334D819-9F07-4261-B09B-9E467E5D9002}" type="datetimeFigureOut">
               <a:rPr lang="en-US" dirty="0"/>
               <a:pPr/>
-              <a:t>3/2/2026</a:t>
+              <a:t>3/16/2026</a:t>
             </a:fld>
             <a:endParaRPr lang="en-US" dirty="0"/>
           </a:p>
@@ -11249,7 +11249,7 @@
           <a:graphicData uri="http://schemas.openxmlformats.org/presentationml/2006/ole">
             <mc:AlternateContent xmlns:mc="http://schemas.openxmlformats.org/markup-compatibility/2006">
               <mc:Choice xmlns:v="urn:schemas-microsoft-com:vml" Requires="v">
-                <p:oleObj spid="_x0000_s6212" name="Packager Shell Object" showAsIcon="1" r:id="rId3" imgW="469440" imgH="481320" progId="Package">
+                <p:oleObj spid="_x0000_s6214" name="Packager Shell Object" showAsIcon="1" r:id="rId3" imgW="469440" imgH="481320" progId="Package">
                   <p:embed/>
                 </p:oleObj>
               </mc:Choice>
@@ -11808,7 +11808,7 @@
           <a:graphicData uri="http://schemas.openxmlformats.org/presentationml/2006/ole">
             <mc:AlternateContent xmlns:mc="http://schemas.openxmlformats.org/markup-compatibility/2006">
               <mc:Choice xmlns:v="urn:schemas-microsoft-com:vml" Requires="v">
-                <p:oleObj spid="_x0000_s7236" name="Packager Shell Object" showAsIcon="1" r:id="rId3" imgW="440280" imgH="481320" progId="Package">
+                <p:oleObj spid="_x0000_s7238" name="Packager Shell Object" showAsIcon="1" r:id="rId3" imgW="440280" imgH="481320" progId="Package">
                   <p:embed/>
                 </p:oleObj>
               </mc:Choice>
